--- a/docs/meetings/TSAT_Production_Pull_Loop_Flow_2026-09-25.pptx
+++ b/docs/meetings/TSAT_Production_Pull_Loop_Flow_2026-09-25.pptx
@@ -3096,7 +3096,7 @@
       <p:grpSpPr/>
       <p:pic>
         <p:nvPicPr>
-          <p:cNvPr id="2" name="Picture 1" descr="bg_title.png"/>
+          <p:cNvPr id="2" name="Picture 1" descr="logo_r01.png"/>
           <p:cNvPicPr>
             <a:picLocks noChangeAspect="1"/>
           </p:cNvPicPr>
@@ -3110,17 +3110,288 @@
         </p:blipFill>
         <p:spPr>
           <a:xfrm>
-            <a:off x="0" y="0"/>
-            <a:ext cx="12191695" cy="6858000"/>
+            <a:off x="5413248" y="256032"/>
+            <a:ext cx="1143000" cy="1143000"/>
           </a:xfrm>
           <a:prstGeom prst="rect">
             <a:avLst/>
           </a:prstGeom>
         </p:spPr>
       </p:pic>
+      <p:sp>
+        <p:nvSpPr>
+          <p:cNvPr id="3" name="TextBox 2"/>
+          <p:cNvSpPr txBox="1"/>
+          <p:nvPr/>
+        </p:nvSpPr>
+        <p:spPr>
+          <a:xfrm>
+            <a:off x="548640" y="1517904"/>
+            <a:ext cx="11091672" cy="640080"/>
+          </a:xfrm>
+          <a:prstGeom prst="rect">
+            <a:avLst/>
+          </a:prstGeom>
+          <a:noFill/>
+        </p:spPr>
+        <p:txBody>
+          <a:bodyPr wrap="square" anchor="ctr" lIns="27432" rIns="27432" tIns="9144" bIns="9144">
+            <a:spAutoFit/>
+          </a:bodyPr>
+          <a:lstStyle/>
+          <a:p>
+            <a:pPr algn="ctr">
+              <a:spcBef>
+                <a:spcPts val="0"/>
+              </a:spcBef>
+              <a:spcAft>
+                <a:spcPts val="200"/>
+              </a:spcAft>
+            </a:pPr>
+            <a:r>
+              <a:rPr sz="4000" b="1" i="0">
+                <a:solidFill>
+                  <a:srgbClr val="068734"/>
+                </a:solidFill>
+                <a:latin typeface="Tahoma"/>
+              </a:rPr>
+              <a:t>โฟลว์การเรียกงาน  ผลิต ➜ สโตร์</a:t>
+            </a:r>
+          </a:p>
+        </p:txBody>
+      </p:sp>
+      <p:sp>
+        <p:nvSpPr>
+          <p:cNvPr id="4" name="TextBox 3"/>
+          <p:cNvSpPr txBox="1"/>
+          <p:nvPr/>
+        </p:nvSpPr>
+        <p:spPr>
+          <a:xfrm>
+            <a:off x="548640" y="2194560"/>
+            <a:ext cx="11091672" cy="329184"/>
+          </a:xfrm>
+          <a:prstGeom prst="rect">
+            <a:avLst/>
+          </a:prstGeom>
+          <a:noFill/>
+        </p:spPr>
+        <p:txBody>
+          <a:bodyPr wrap="square" anchor="ctr" lIns="27432" rIns="27432" tIns="9144" bIns="9144">
+            <a:spAutoFit/>
+          </a:bodyPr>
+          <a:lstStyle/>
+          <a:p>
+            <a:pPr algn="ctr">
+              <a:spcBef>
+                <a:spcPts val="0"/>
+              </a:spcBef>
+              <a:spcAft>
+                <a:spcPts val="200"/>
+              </a:spcAft>
+            </a:pPr>
+            <a:r>
+              <a:rPr sz="1800" b="1" i="0">
+                <a:solidFill>
+                  <a:srgbClr val="D95323"/>
+                </a:solidFill>
+                <a:latin typeface="Tahoma"/>
+              </a:rPr>
+              <a:t>Production Pull Loop — ใครกดอะไร ที่หน้าจอไหน</a:t>
+            </a:r>
+          </a:p>
+        </p:txBody>
+      </p:sp>
+      <p:sp>
+        <p:nvSpPr>
+          <p:cNvPr id="5" name="TextBox 4"/>
+          <p:cNvSpPr txBox="1"/>
+          <p:nvPr/>
+        </p:nvSpPr>
+        <p:spPr>
+          <a:xfrm>
+            <a:off x="1828800" y="2670048"/>
+            <a:ext cx="8531352" cy="868680"/>
+          </a:xfrm>
+          <a:prstGeom prst="rect">
+            <a:avLst/>
+          </a:prstGeom>
+          <a:noFill/>
+        </p:spPr>
+        <p:txBody>
+          <a:bodyPr wrap="square" anchor="t" lIns="27432" rIns="27432" tIns="9144" bIns="9144">
+            <a:spAutoFit/>
+          </a:bodyPr>
+          <a:lstStyle/>
+          <a:p>
+            <a:pPr algn="ctr">
+              <a:spcBef>
+                <a:spcPts val="0"/>
+              </a:spcBef>
+              <a:spcAft>
+                <a:spcPts val="400"/>
+              </a:spcAft>
+            </a:pPr>
+            <a:r>
+              <a:rPr sz="1600" b="0" i="0">
+                <a:solidFill>
+                  <a:srgbClr val="068734"/>
+                </a:solidFill>
+                <a:latin typeface="Tahoma"/>
+              </a:rPr>
+              <a:t>ประชุมมอบหมายงาน · 25 กันยายน 2569</a:t>
+            </a:r>
+          </a:p>
+          <a:p>
+            <a:pPr algn="ctr">
+              <a:spcBef>
+                <a:spcPts val="0"/>
+              </a:spcBef>
+              <a:spcAft>
+                <a:spcPts val="400"/>
+              </a:spcAft>
+            </a:pPr>
+            <a:r>
+              <a:rPr sz="1600" b="0" i="0">
+                <a:solidFill>
+                  <a:srgbClr val="068734"/>
+                </a:solidFill>
+                <a:latin typeface="Tahoma"/>
+              </a:rPr>
+              <a:t>Thai Summit Autoparts Industry — PD3 / Store / Planning</a:t>
+            </a:r>
+          </a:p>
+        </p:txBody>
+      </p:sp>
+      <p:sp>
+        <p:nvSpPr>
+          <p:cNvPr id="6" name="TextBox 5"/>
+          <p:cNvSpPr txBox="1"/>
+          <p:nvPr/>
+        </p:nvSpPr>
+        <p:spPr>
+          <a:xfrm>
+            <a:off x="3200400" y="3959352"/>
+            <a:ext cx="5788152" cy="365760"/>
+          </a:xfrm>
+          <a:prstGeom prst="rect">
+            <a:avLst/>
+          </a:prstGeom>
+          <a:noFill/>
+        </p:spPr>
+        <p:txBody>
+          <a:bodyPr wrap="square" anchor="t" lIns="27432" rIns="27432" tIns="9144" bIns="9144">
+            <a:spAutoFit/>
+          </a:bodyPr>
+          <a:lstStyle/>
+          <a:p>
+            <a:pPr algn="ctr">
+              <a:spcBef>
+                <a:spcPts val="0"/>
+              </a:spcBef>
+              <a:spcAft>
+                <a:spcPts val="200"/>
+              </a:spcAft>
+            </a:pPr>
+            <a:r>
+              <a:rPr sz="1800" b="1" i="1">
+                <a:solidFill>
+                  <a:srgbClr val="068734"/>
+                </a:solidFill>
+                <a:latin typeface="Tahoma"/>
+              </a:rPr>
+              <a:t>My Quality Declaration</a:t>
+            </a:r>
+          </a:p>
+        </p:txBody>
+      </p:sp>
+      <p:sp>
+        <p:nvSpPr>
+          <p:cNvPr id="7" name="TextBox 6"/>
+          <p:cNvSpPr txBox="1"/>
+          <p:nvPr/>
+        </p:nvSpPr>
+        <p:spPr>
+          <a:xfrm>
+            <a:off x="1920240" y="4434840"/>
+            <a:ext cx="8348472" cy="365760"/>
+          </a:xfrm>
+          <a:prstGeom prst="rect">
+            <a:avLst/>
+          </a:prstGeom>
+          <a:noFill/>
+        </p:spPr>
+        <p:txBody>
+          <a:bodyPr wrap="square" anchor="t" lIns="27432" rIns="27432" tIns="9144" bIns="9144">
+            <a:spAutoFit/>
+          </a:bodyPr>
+          <a:lstStyle/>
+          <a:p>
+            <a:pPr algn="ctr">
+              <a:spcBef>
+                <a:spcPts val="0"/>
+              </a:spcBef>
+              <a:spcAft>
+                <a:spcPts val="200"/>
+              </a:spcAft>
+            </a:pPr>
+            <a:r>
+              <a:rPr sz="1700" b="0" i="0">
+                <a:solidFill>
+                  <a:srgbClr val="068734"/>
+                </a:solidFill>
+                <a:latin typeface="Tahoma"/>
+              </a:rPr>
+              <a:t>“I will not accept, produce and deliver non-quality work”</a:t>
+            </a:r>
+          </a:p>
+        </p:txBody>
+      </p:sp>
+      <p:sp>
+        <p:nvSpPr>
+          <p:cNvPr id="8" name="TextBox 7"/>
+          <p:cNvSpPr txBox="1"/>
+          <p:nvPr/>
+        </p:nvSpPr>
+        <p:spPr>
+          <a:xfrm>
+            <a:off x="1920240" y="4846320"/>
+            <a:ext cx="8348472" cy="365760"/>
+          </a:xfrm>
+          <a:prstGeom prst="rect">
+            <a:avLst/>
+          </a:prstGeom>
+          <a:noFill/>
+        </p:spPr>
+        <p:txBody>
+          <a:bodyPr wrap="square" anchor="t" lIns="27432" rIns="27432" tIns="9144" bIns="9144">
+            <a:spAutoFit/>
+          </a:bodyPr>
+          <a:lstStyle/>
+          <a:p>
+            <a:pPr algn="ctr">
+              <a:spcBef>
+                <a:spcPts val="0"/>
+              </a:spcBef>
+              <a:spcAft>
+                <a:spcPts val="200"/>
+              </a:spcAft>
+            </a:pPr>
+            <a:r>
+              <a:rPr sz="1700" b="0" i="0">
+                <a:solidFill>
+                  <a:srgbClr val="068734"/>
+                </a:solidFill>
+                <a:latin typeface="Tahoma"/>
+              </a:rPr>
+              <a:t>“ผมจะไม่รับ, ไม่ทำและไม่ส่งมอบงานที่ไม่มีคุณภาพ”</a:t>
+            </a:r>
+          </a:p>
+        </p:txBody>
+      </p:sp>
       <p:pic>
         <p:nvPicPr>
-          <p:cNvPr id="3" name="Picture 2" descr="logo_big.png"/>
+          <p:cNvPr id="9" name="Picture 8" descr="title_a.jpg"/>
           <p:cNvPicPr>
             <a:picLocks noChangeAspect="1"/>
           </p:cNvPicPr>
@@ -3128,230 +3399,96 @@
         </p:nvPicPr>
         <p:blipFill>
           <a:blip r:embed="rId3"/>
+          <a:srcRect l="118" r="118"/>
           <a:stretch>
             <a:fillRect/>
           </a:stretch>
         </p:blipFill>
         <p:spPr>
           <a:xfrm>
-            <a:off x="5486400" y="502920"/>
-            <a:ext cx="1481328" cy="1554480"/>
+            <a:off x="4434840" y="5577840"/>
+            <a:ext cx="1920240" cy="1161288"/>
           </a:xfrm>
           <a:prstGeom prst="rect">
             <a:avLst/>
           </a:prstGeom>
         </p:spPr>
       </p:pic>
-      <p:sp>
-        <p:nvSpPr>
-          <p:cNvPr id="4" name="TextBox 3"/>
-          <p:cNvSpPr txBox="1"/>
-          <p:nvPr/>
-        </p:nvSpPr>
-        <p:spPr>
-          <a:xfrm>
-            <a:off x="914400" y="2514600"/>
-            <a:ext cx="10332720" cy="1005840"/>
-          </a:xfrm>
-          <a:prstGeom prst="rect">
-            <a:avLst/>
-          </a:prstGeom>
-          <a:noFill/>
-        </p:spPr>
-        <p:txBody>
-          <a:bodyPr wrap="square" anchor="t" lIns="27432" rIns="27432" tIns="9144" bIns="9144">
-            <a:spAutoFit/>
-          </a:bodyPr>
-          <a:lstStyle/>
-          <a:p>
-            <a:pPr algn="l">
-              <a:spcBef>
-                <a:spcPts val="0"/>
-              </a:spcBef>
-              <a:spcAft>
-                <a:spcPts val="200"/>
-              </a:spcAft>
-            </a:pPr>
-            <a:r>
-              <a:rPr sz="4400" b="1" i="0">
-                <a:solidFill>
-                  <a:srgbClr val="FFFFFF"/>
-                </a:solidFill>
-                <a:latin typeface="Tahoma"/>
-              </a:rPr>
-              <a:t>โฟลว์การเรียกงาน  ผลิต ➜ สโตร์</a:t>
-            </a:r>
-          </a:p>
-        </p:txBody>
-      </p:sp>
-      <p:sp>
-        <p:nvSpPr>
-          <p:cNvPr id="5" name="TextBox 4"/>
-          <p:cNvSpPr txBox="1"/>
-          <p:nvPr/>
-        </p:nvSpPr>
-        <p:spPr>
-          <a:xfrm>
-            <a:off x="914400" y="3566160"/>
-            <a:ext cx="10332720" cy="640080"/>
-          </a:xfrm>
-          <a:prstGeom prst="rect">
-            <a:avLst/>
-          </a:prstGeom>
-          <a:noFill/>
-        </p:spPr>
-        <p:txBody>
-          <a:bodyPr wrap="square" anchor="t" lIns="27432" rIns="27432" tIns="9144" bIns="9144">
-            <a:spAutoFit/>
-          </a:bodyPr>
-          <a:lstStyle/>
-          <a:p>
-            <a:pPr algn="l">
-              <a:spcBef>
-                <a:spcPts val="0"/>
-              </a:spcBef>
-              <a:spcAft>
-                <a:spcPts val="200"/>
-              </a:spcAft>
-            </a:pPr>
-            <a:r>
-              <a:rPr sz="2400" b="1" i="0">
-                <a:solidFill>
-                  <a:srgbClr val="EBD9B0"/>
-                </a:solidFill>
-                <a:latin typeface="Tahoma"/>
-              </a:rPr>
-              <a:t>Production Pull Loop — ใครกดอะไร ที่หน้าจอไหน</a:t>
-            </a:r>
-          </a:p>
-        </p:txBody>
-      </p:sp>
-      <p:sp>
-        <p:nvSpPr>
-          <p:cNvPr id="6" name="TextBox 5"/>
-          <p:cNvSpPr txBox="1"/>
-          <p:nvPr/>
-        </p:nvSpPr>
-        <p:spPr>
-          <a:xfrm>
-            <a:off x="914400" y="4526280"/>
-            <a:ext cx="10332720" cy="457200"/>
-          </a:xfrm>
-          <a:prstGeom prst="rect">
-            <a:avLst/>
-          </a:prstGeom>
-          <a:noFill/>
-        </p:spPr>
-        <p:txBody>
-          <a:bodyPr wrap="square" anchor="t" lIns="27432" rIns="27432" tIns="9144" bIns="9144">
-            <a:spAutoFit/>
-          </a:bodyPr>
-          <a:lstStyle/>
-          <a:p>
-            <a:pPr algn="l">
-              <a:spcBef>
-                <a:spcPts val="0"/>
-              </a:spcBef>
-              <a:spcAft>
-                <a:spcPts val="200"/>
-              </a:spcAft>
-            </a:pPr>
-            <a:r>
-              <a:rPr sz="1600" b="0" i="0">
-                <a:solidFill>
-                  <a:srgbClr val="FFFFFF"/>
-                </a:solidFill>
-                <a:latin typeface="Tahoma"/>
-              </a:rPr>
-              <a:t>ประชุมมอบหมายงาน · 25 กันยายน 2569</a:t>
-            </a:r>
-          </a:p>
-        </p:txBody>
-      </p:sp>
-      <p:sp>
-        <p:nvSpPr>
-          <p:cNvPr id="7" name="TextBox 6"/>
-          <p:cNvSpPr txBox="1"/>
-          <p:nvPr/>
-        </p:nvSpPr>
-        <p:spPr>
-          <a:xfrm>
-            <a:off x="914400" y="4892040"/>
-            <a:ext cx="10332720" cy="457200"/>
-          </a:xfrm>
-          <a:prstGeom prst="rect">
-            <a:avLst/>
-          </a:prstGeom>
-          <a:noFill/>
-        </p:spPr>
-        <p:txBody>
-          <a:bodyPr wrap="square" anchor="t" lIns="27432" rIns="27432" tIns="9144" bIns="9144">
-            <a:spAutoFit/>
-          </a:bodyPr>
-          <a:lstStyle/>
-          <a:p>
-            <a:pPr algn="l">
-              <a:spcBef>
-                <a:spcPts val="0"/>
-              </a:spcBef>
-              <a:spcAft>
-                <a:spcPts val="200"/>
-              </a:spcAft>
-            </a:pPr>
-            <a:r>
-              <a:rPr sz="1400" b="0" i="0">
-                <a:solidFill>
-                  <a:srgbClr val="CFE0C8"/>
-                </a:solidFill>
-                <a:latin typeface="Tahoma"/>
-              </a:rPr>
-              <a:t>Thai Summit Autoparts Industry — PD3 / Store / Planning</a:t>
-            </a:r>
-          </a:p>
-        </p:txBody>
-      </p:sp>
-      <p:sp>
-        <p:nvSpPr>
-          <p:cNvPr id="8" name="TextBox 7"/>
-          <p:cNvSpPr txBox="1"/>
-          <p:nvPr/>
-        </p:nvSpPr>
-        <p:spPr>
-          <a:xfrm>
-            <a:off x="914400" y="5532120"/>
-            <a:ext cx="10332720" cy="548640"/>
-          </a:xfrm>
-          <a:prstGeom prst="rect">
-            <a:avLst/>
-          </a:prstGeom>
-          <a:noFill/>
-        </p:spPr>
-        <p:txBody>
-          <a:bodyPr wrap="square" anchor="t" lIns="27432" rIns="27432" tIns="9144" bIns="9144">
-            <a:spAutoFit/>
-          </a:bodyPr>
-          <a:lstStyle/>
-          <a:p>
-            <a:pPr algn="l">
-              <a:spcBef>
-                <a:spcPts val="0"/>
-              </a:spcBef>
-              <a:spcAft>
-                <a:spcPts val="200"/>
-              </a:spcAft>
-            </a:pPr>
-            <a:r>
-              <a:rPr sz="1500" b="1" i="1">
-                <a:solidFill>
-                  <a:srgbClr val="EBD9B0"/>
-                </a:solidFill>
-                <a:latin typeface="Tahoma"/>
-              </a:rPr>
-              <a:t>ข้อมูลทุกตัวเลขในเอกสารนี้วัดจากฐานข้อมูลจริง ณ 25/09/2569</a:t>
-            </a:r>
-          </a:p>
-        </p:txBody>
-      </p:sp>
+      <p:pic>
+        <p:nvPicPr>
+          <p:cNvPr id="10" name="Picture 9" descr="title_b.jpg"/>
+          <p:cNvPicPr>
+            <a:picLocks noChangeAspect="1"/>
+          </p:cNvPicPr>
+          <p:nvPr/>
+        </p:nvPicPr>
+        <p:blipFill>
+          <a:blip r:embed="rId4"/>
+          <a:srcRect l="4710" r="4710"/>
+          <a:stretch>
+            <a:fillRect/>
+          </a:stretch>
+        </p:blipFill>
+        <p:spPr>
+          <a:xfrm>
+            <a:off x="6473952" y="5577840"/>
+            <a:ext cx="1856231" cy="1152144"/>
+          </a:xfrm>
+          <a:prstGeom prst="rect">
+            <a:avLst/>
+          </a:prstGeom>
+        </p:spPr>
+      </p:pic>
+      <p:pic>
+        <p:nvPicPr>
+          <p:cNvPr id="11" name="Picture 10" descr="title_c.jpg"/>
+          <p:cNvPicPr>
+            <a:picLocks noChangeAspect="1"/>
+          </p:cNvPicPr>
+          <p:nvPr/>
+        </p:nvPicPr>
+        <p:blipFill>
+          <a:blip r:embed="rId5"/>
+          <a:srcRect l="15297" r="15297"/>
+          <a:stretch>
+            <a:fillRect/>
+          </a:stretch>
+        </p:blipFill>
+        <p:spPr>
+          <a:xfrm>
+            <a:off x="8439912" y="5550408"/>
+            <a:ext cx="1847088" cy="1188720"/>
+          </a:xfrm>
+          <a:prstGeom prst="rect">
+            <a:avLst/>
+          </a:prstGeom>
+        </p:spPr>
+      </p:pic>
+      <p:pic>
+        <p:nvPicPr>
+          <p:cNvPr id="12" name="Picture 11" descr="title_d.jpg"/>
+          <p:cNvPicPr>
+            <a:picLocks noChangeAspect="1"/>
+          </p:cNvPicPr>
+          <p:nvPr/>
+        </p:nvPicPr>
+        <p:blipFill>
+          <a:blip r:embed="rId6"/>
+          <a:srcRect t="8086" b="8086"/>
+          <a:stretch>
+            <a:fillRect/>
+          </a:stretch>
+        </p:blipFill>
+        <p:spPr>
+          <a:xfrm>
+            <a:off x="10405872" y="5577840"/>
+            <a:ext cx="1847088" cy="1161288"/>
+          </a:xfrm>
+          <a:prstGeom prst="rect">
+            <a:avLst/>
+          </a:prstGeom>
+        </p:spPr>
+      </p:pic>
     </p:spTree>
   </p:cSld>
   <p:clrMapOvr>
@@ -3378,8 +3515,8 @@
         </p:nvSpPr>
         <p:spPr>
           <a:xfrm>
-            <a:off x="457200" y="256032"/>
-            <a:ext cx="10881360" cy="868680"/>
+            <a:off x="256032" y="256032"/>
+            <a:ext cx="11430000" cy="649224"/>
           </a:xfrm>
           <a:prstGeom prst="rect">
             <a:avLst/>
@@ -3387,7 +3524,7 @@
           <a:noFill/>
         </p:spPr>
         <p:txBody>
-          <a:bodyPr wrap="square" anchor="ctr" lIns="27432" rIns="27432" tIns="9144" bIns="9144">
+          <a:bodyPr wrap="square" anchor="t" lIns="27432" rIns="27432" tIns="9144" bIns="9144">
             <a:spAutoFit/>
           </a:bodyPr>
           <a:lstStyle/>
@@ -3401,9 +3538,9 @@
               </a:spcAft>
             </a:pPr>
             <a:r>
-              <a:rPr sz="3400" b="1" i="0">
-                <a:solidFill>
-                  <a:srgbClr val="0D3D14"/>
+              <a:rPr sz="3300" b="1" i="0">
+                <a:solidFill>
+                  <a:srgbClr val="068734"/>
                 </a:solidFill>
                 <a:latin typeface="Tahoma"/>
               </a:rPr>
@@ -3420,8 +3557,8 @@
         </p:nvSpPr>
         <p:spPr>
           <a:xfrm>
-            <a:off x="502920" y="1024128"/>
-            <a:ext cx="10881360" cy="457200"/>
+            <a:off x="384048" y="960120"/>
+            <a:ext cx="11247120" cy="402336"/>
           </a:xfrm>
           <a:prstGeom prst="rect">
             <a:avLst/>
@@ -3443,9 +3580,9 @@
               </a:spcAft>
             </a:pPr>
             <a:r>
-              <a:rPr sz="1900" b="1" i="0">
-                <a:solidFill>
-                  <a:srgbClr val="2C5F2D"/>
+              <a:rPr sz="2000" b="1" i="0">
+                <a:solidFill>
+                  <a:srgbClr val="068734"/>
                 </a:solidFill>
                 <a:latin typeface="Tahoma"/>
               </a:rPr>
@@ -3733,7 +3870,7 @@
             <a:avLst/>
           </a:prstGeom>
           <a:solidFill>
-            <a:srgbClr val="C0561E"/>
+            <a:srgbClr val="D95323"/>
           </a:solidFill>
           <a:ln>
             <a:noFill/>
@@ -3876,7 +4013,7 @@
           <a:effectLst>
             <a:outerShdw blurRad="50000" dist="20000" dir="5400000" rotWithShape="0">
               <a:srgbClr val="8A99AD">
-                <a:alpha val="38000"/>
+                <a:alpha val="30000"/>
               </a:srgbClr>
             </a:outerShdw>
           </a:effectLst>
@@ -3918,7 +4055,7 @@
             <a:avLst/>
           </a:prstGeom>
           <a:solidFill>
-            <a:srgbClr val="C0561E"/>
+            <a:srgbClr val="D95323"/>
           </a:solidFill>
           <a:ln>
             <a:noFill/>
@@ -4076,7 +4213,7 @@
           <a:effectLst>
             <a:outerShdw blurRad="50000" dist="20000" dir="5400000" rotWithShape="0">
               <a:srgbClr val="8A99AD">
-                <a:alpha val="38000"/>
+                <a:alpha val="30000"/>
               </a:srgbClr>
             </a:outerShdw>
           </a:effectLst>
@@ -4118,7 +4255,7 @@
             <a:avLst/>
           </a:prstGeom>
           <a:solidFill>
-            <a:srgbClr val="C0561E"/>
+            <a:srgbClr val="D95323"/>
           </a:solidFill>
           <a:ln>
             <a:noFill/>
@@ -4276,7 +4413,7 @@
           <a:effectLst>
             <a:outerShdw blurRad="50000" dist="20000" dir="5400000" rotWithShape="0">
               <a:srgbClr val="8A99AD">
-                <a:alpha val="38000"/>
+                <a:alpha val="30000"/>
               </a:srgbClr>
             </a:outerShdw>
           </a:effectLst>
@@ -4318,7 +4455,7 @@
             <a:avLst/>
           </a:prstGeom>
           <a:solidFill>
-            <a:srgbClr val="C0561E"/>
+            <a:srgbClr val="D95323"/>
           </a:solidFill>
           <a:ln>
             <a:noFill/>
@@ -4476,7 +4613,7 @@
           <a:effectLst>
             <a:outerShdw blurRad="50000" dist="20000" dir="5400000" rotWithShape="0">
               <a:srgbClr val="8A99AD">
-                <a:alpha val="38000"/>
+                <a:alpha val="30000"/>
               </a:srgbClr>
             </a:outerShdw>
           </a:effectLst>
@@ -4518,7 +4655,7 @@
             <a:avLst/>
           </a:prstGeom>
           <a:solidFill>
-            <a:srgbClr val="C0561E"/>
+            <a:srgbClr val="D95323"/>
           </a:solidFill>
           <a:ln>
             <a:noFill/>
@@ -4669,14 +4806,14 @@
           </a:solidFill>
           <a:ln w="19050">
             <a:solidFill>
-              <a:srgbClr val="C0561E"/>
+              <a:srgbClr val="D95323"/>
             </a:solidFill>
           </a:ln>
           <a:effectLst/>
           <a:effectLst>
             <a:outerShdw blurRad="50000" dist="20000" dir="5400000" rotWithShape="0">
               <a:srgbClr val="8A99AD">
-                <a:alpha val="38000"/>
+                <a:alpha val="30000"/>
               </a:srgbClr>
             </a:outerShdw>
           </a:effectLst>
@@ -4718,7 +4855,7 @@
             <a:avLst/>
           </a:prstGeom>
           <a:solidFill>
-            <a:srgbClr val="C0561E"/>
+            <a:srgbClr val="D95323"/>
           </a:solidFill>
           <a:ln>
             <a:noFill/>
@@ -4869,14 +5006,14 @@
           </a:solidFill>
           <a:ln w="19050">
             <a:solidFill>
-              <a:srgbClr val="C0561E"/>
+              <a:srgbClr val="D95323"/>
             </a:solidFill>
           </a:ln>
           <a:effectLst/>
           <a:effectLst>
             <a:outerShdw blurRad="50000" dist="20000" dir="5400000" rotWithShape="0">
               <a:srgbClr val="8A99AD">
-                <a:alpha val="38000"/>
+                <a:alpha val="30000"/>
               </a:srgbClr>
             </a:outerShdw>
           </a:effectLst>
@@ -4918,7 +5055,7 @@
             <a:avLst/>
           </a:prstGeom>
           <a:solidFill>
-            <a:srgbClr val="C0561E"/>
+            <a:srgbClr val="D95323"/>
           </a:solidFill>
           <a:ln>
             <a:noFill/>
@@ -5076,7 +5213,7 @@
           <a:effectLst>
             <a:outerShdw blurRad="50000" dist="20000" dir="5400000" rotWithShape="0">
               <a:srgbClr val="8A99AD">
-                <a:alpha val="38000"/>
+                <a:alpha val="30000"/>
               </a:srgbClr>
             </a:outerShdw>
           </a:effectLst>
@@ -5118,7 +5255,7 @@
             <a:avLst/>
           </a:prstGeom>
           <a:solidFill>
-            <a:srgbClr val="C0561E"/>
+            <a:srgbClr val="D95323"/>
           </a:solidFill>
           <a:ln>
             <a:noFill/>
@@ -5266,7 +5403,7 @@
           </a:prstGeom>
           <a:ln w="22225">
             <a:solidFill>
-              <a:srgbClr val="C0561E"/>
+              <a:srgbClr val="D95323"/>
             </a:solidFill>
             <a:headEnd type="none"/>
             <a:tailEnd type="triangle" w="med" len="med"/>
@@ -5303,7 +5440,7 @@
           </a:prstGeom>
           <a:ln w="22225">
             <a:solidFill>
-              <a:srgbClr val="C0561E"/>
+              <a:srgbClr val="D95323"/>
             </a:solidFill>
             <a:headEnd type="none"/>
             <a:tailEnd type="triangle" w="med" len="med"/>
@@ -5340,7 +5477,7 @@
           </a:prstGeom>
           <a:ln w="22225">
             <a:solidFill>
-              <a:srgbClr val="C0561E"/>
+              <a:srgbClr val="D95323"/>
             </a:solidFill>
             <a:headEnd type="none"/>
             <a:tailEnd type="triangle" w="med" len="med"/>
@@ -5377,7 +5514,7 @@
           </a:prstGeom>
           <a:ln w="22225">
             <a:solidFill>
-              <a:srgbClr val="C0561E"/>
+              <a:srgbClr val="D95323"/>
             </a:solidFill>
             <a:headEnd type="none"/>
             <a:tailEnd type="triangle" w="med" len="med"/>
@@ -5414,7 +5551,7 @@
           </a:prstGeom>
           <a:ln w="22225">
             <a:solidFill>
-              <a:srgbClr val="C0561E"/>
+              <a:srgbClr val="D95323"/>
             </a:solidFill>
             <a:headEnd type="none"/>
             <a:tailEnd type="triangle" w="med" len="med"/>
@@ -5451,7 +5588,7 @@
           </a:prstGeom>
           <a:ln w="22225">
             <a:solidFill>
-              <a:srgbClr val="C0561E"/>
+              <a:srgbClr val="D95323"/>
             </a:solidFill>
             <a:headEnd type="none"/>
             <a:tailEnd type="triangle" w="med" len="med"/>
@@ -5514,7 +5651,7 @@
             <a:r>
               <a:rPr sz="1200" b="1" i="0">
                 <a:solidFill>
-                  <a:srgbClr val="C0561E"/>
+                  <a:srgbClr val="D95323"/>
                 </a:solidFill>
                 <a:latin typeface="Tahoma"/>
               </a:rPr>
@@ -5567,7 +5704,7 @@
       </p:sp>
       <p:pic>
         <p:nvPicPr>
-          <p:cNvPr id="49" name="Picture 48" descr="logo_footer.png"/>
+          <p:cNvPr id="49" name="Picture 48" descr="logo_r01.png"/>
           <p:cNvPicPr>
             <a:picLocks noChangeAspect="1"/>
           </p:cNvPicPr>
@@ -5581,8 +5718,8 @@
         </p:blipFill>
         <p:spPr>
           <a:xfrm>
-            <a:off x="384048" y="6327648"/>
-            <a:ext cx="365760" cy="384048"/>
+            <a:off x="249631" y="6448348"/>
+            <a:ext cx="237744" cy="237744"/>
           </a:xfrm>
           <a:prstGeom prst="rect">
             <a:avLst/>
@@ -5597,8 +5734,8 @@
         </p:nvSpPr>
         <p:spPr>
           <a:xfrm>
-            <a:off x="786384" y="6327648"/>
-            <a:ext cx="4114800" cy="411480"/>
+            <a:off x="566928" y="6353251"/>
+            <a:ext cx="3246120" cy="400507"/>
           </a:xfrm>
           <a:prstGeom prst="rect">
             <a:avLst/>
@@ -5620,9 +5757,9 @@
               </a:spcAft>
             </a:pPr>
             <a:r>
-              <a:rPr sz="1300" b="1" i="0">
-                <a:solidFill>
-                  <a:srgbClr val="0D3D14"/>
+              <a:rPr sz="2000" b="1" i="0">
+                <a:solidFill>
+                  <a:srgbClr val="068734"/>
                 </a:solidFill>
                 <a:latin typeface="Tahoma"/>
               </a:rPr>
@@ -5639,8 +5776,8 @@
         </p:nvSpPr>
         <p:spPr>
           <a:xfrm>
-            <a:off x="11430000" y="6355080"/>
-            <a:ext cx="594360" cy="365760"/>
+            <a:off x="9400032" y="6510528"/>
+            <a:ext cx="2514600" cy="292608"/>
           </a:xfrm>
           <a:prstGeom prst="rect">
             <a:avLst/>
@@ -5648,7 +5785,7 @@
           <a:noFill/>
         </p:spPr>
         <p:txBody>
-          <a:bodyPr wrap="square" anchor="ctr" lIns="27432" rIns="27432" tIns="9144" bIns="9144">
+          <a:bodyPr wrap="square" anchor="t" lIns="27432" rIns="27432" tIns="9144" bIns="9144">
             <a:spAutoFit/>
           </a:bodyPr>
           <a:lstStyle/>
@@ -5664,7 +5801,7 @@
             <a:r>
               <a:rPr sz="1200" b="0" i="0">
                 <a:solidFill>
-                  <a:srgbClr val="555555"/>
+                  <a:srgbClr val="068734"/>
                 </a:solidFill>
                 <a:latin typeface="Tahoma"/>
               </a:rPr>
@@ -5699,8 +5836,8 @@
         </p:nvSpPr>
         <p:spPr>
           <a:xfrm>
-            <a:off x="457200" y="256032"/>
-            <a:ext cx="10881360" cy="868680"/>
+            <a:off x="256032" y="256032"/>
+            <a:ext cx="11430000" cy="649224"/>
           </a:xfrm>
           <a:prstGeom prst="rect">
             <a:avLst/>
@@ -5708,7 +5845,7 @@
           <a:noFill/>
         </p:spPr>
         <p:txBody>
-          <a:bodyPr wrap="square" anchor="ctr" lIns="27432" rIns="27432" tIns="9144" bIns="9144">
+          <a:bodyPr wrap="square" anchor="t" lIns="27432" rIns="27432" tIns="9144" bIns="9144">
             <a:spAutoFit/>
           </a:bodyPr>
           <a:lstStyle/>
@@ -5722,9 +5859,9 @@
               </a:spcAft>
             </a:pPr>
             <a:r>
-              <a:rPr sz="3400" b="1" i="0">
-                <a:solidFill>
-                  <a:srgbClr val="0D3D14"/>
+              <a:rPr sz="3600" b="1" i="0">
+                <a:solidFill>
+                  <a:srgbClr val="068734"/>
                 </a:solidFill>
                 <a:latin typeface="Tahoma"/>
               </a:rPr>
@@ -5741,8 +5878,8 @@
         </p:nvSpPr>
         <p:spPr>
           <a:xfrm>
-            <a:off x="502920" y="1024128"/>
-            <a:ext cx="10881360" cy="457200"/>
+            <a:off x="384048" y="960120"/>
+            <a:ext cx="11247120" cy="402336"/>
           </a:xfrm>
           <a:prstGeom prst="rect">
             <a:avLst/>
@@ -5764,9 +5901,9 @@
               </a:spcAft>
             </a:pPr>
             <a:r>
-              <a:rPr sz="1900" b="1" i="0">
-                <a:solidFill>
-                  <a:srgbClr val="2C5F2D"/>
+              <a:rPr sz="1800" b="1" i="0">
+                <a:solidFill>
+                  <a:srgbClr val="068734"/>
                 </a:solidFill>
                 <a:latin typeface="Tahoma"/>
               </a:rPr>
@@ -6220,7 +6357,7 @@
             <a:avLst/>
           </a:prstGeom>
           <a:solidFill>
-            <a:srgbClr val="ECF1E9"/>
+            <a:srgbClr val="F2F2F2"/>
           </a:solidFill>
           <a:ln w="6350">
             <a:solidFill>
@@ -6284,7 +6421,7 @@
             <a:r>
               <a:rPr sz="1050" b="1" i="0">
                 <a:solidFill>
-                  <a:srgbClr val="C0561E"/>
+                  <a:srgbClr val="D95323"/>
                 </a:solidFill>
                 <a:latin typeface="Tahoma"/>
               </a:rPr>
@@ -6308,7 +6445,7 @@
             <a:avLst/>
           </a:prstGeom>
           <a:solidFill>
-            <a:srgbClr val="ECF1E9"/>
+            <a:srgbClr val="F2F2F2"/>
           </a:solidFill>
           <a:ln w="6350">
             <a:solidFill>
@@ -6396,7 +6533,7 @@
             <a:avLst/>
           </a:prstGeom>
           <a:solidFill>
-            <a:srgbClr val="ECF1E9"/>
+            <a:srgbClr val="F2F2F2"/>
           </a:solidFill>
           <a:ln w="6350">
             <a:solidFill>
@@ -6460,7 +6597,7 @@
             <a:r>
               <a:rPr sz="1050" b="0" i="0">
                 <a:solidFill>
-                  <a:srgbClr val="2C5F2D"/>
+                  <a:srgbClr val="068734"/>
                 </a:solidFill>
                 <a:latin typeface="Tahoma"/>
               </a:rPr>
@@ -6484,7 +6621,7 @@
             <a:avLst/>
           </a:prstGeom>
           <a:solidFill>
-            <a:srgbClr val="ECF1E9"/>
+            <a:srgbClr val="F2F2F2"/>
           </a:solidFill>
           <a:ln w="6350">
             <a:solidFill>
@@ -6572,7 +6709,7 @@
             <a:avLst/>
           </a:prstGeom>
           <a:solidFill>
-            <a:srgbClr val="ECF1E9"/>
+            <a:srgbClr val="F2F2F2"/>
           </a:solidFill>
           <a:ln w="6350">
             <a:solidFill>
@@ -6636,7 +6773,7 @@
             <a:r>
               <a:rPr sz="1050" b="0" i="0">
                 <a:solidFill>
-                  <a:srgbClr val="2C5F2D"/>
+                  <a:srgbClr val="068734"/>
                 </a:solidFill>
                 <a:latin typeface="Tahoma"/>
               </a:rPr>
@@ -6724,7 +6861,7 @@
             <a:r>
               <a:rPr sz="1050" b="1" i="0">
                 <a:solidFill>
-                  <a:srgbClr val="C0561E"/>
+                  <a:srgbClr val="D95323"/>
                 </a:solidFill>
                 <a:latin typeface="Tahoma"/>
               </a:rPr>
@@ -6900,7 +7037,7 @@
             <a:r>
               <a:rPr sz="1050" b="0" i="0">
                 <a:solidFill>
-                  <a:srgbClr val="2C5F2D"/>
+                  <a:srgbClr val="068734"/>
                 </a:solidFill>
                 <a:latin typeface="Tahoma"/>
               </a:rPr>
@@ -7076,7 +7213,7 @@
             <a:r>
               <a:rPr sz="1050" b="0" i="0">
                 <a:solidFill>
-                  <a:srgbClr val="2C5F2D"/>
+                  <a:srgbClr val="068734"/>
                 </a:solidFill>
                 <a:latin typeface="Tahoma"/>
               </a:rPr>
@@ -7100,7 +7237,7 @@
             <a:avLst/>
           </a:prstGeom>
           <a:solidFill>
-            <a:srgbClr val="ECF1E9"/>
+            <a:srgbClr val="F2F2F2"/>
           </a:solidFill>
           <a:ln w="6350">
             <a:solidFill>
@@ -7164,7 +7301,7 @@
             <a:r>
               <a:rPr sz="1050" b="1" i="0">
                 <a:solidFill>
-                  <a:srgbClr val="C0561E"/>
+                  <a:srgbClr val="D95323"/>
                 </a:solidFill>
                 <a:latin typeface="Tahoma"/>
               </a:rPr>
@@ -7188,7 +7325,7 @@
             <a:avLst/>
           </a:prstGeom>
           <a:solidFill>
-            <a:srgbClr val="ECF1E9"/>
+            <a:srgbClr val="F2F2F2"/>
           </a:solidFill>
           <a:ln w="6350">
             <a:solidFill>
@@ -7276,7 +7413,7 @@
             <a:avLst/>
           </a:prstGeom>
           <a:solidFill>
-            <a:srgbClr val="ECF1E9"/>
+            <a:srgbClr val="F2F2F2"/>
           </a:solidFill>
           <a:ln w="6350">
             <a:solidFill>
@@ -7340,7 +7477,7 @@
             <a:r>
               <a:rPr sz="1050" b="0" i="0">
                 <a:solidFill>
-                  <a:srgbClr val="2C5F2D"/>
+                  <a:srgbClr val="068734"/>
                 </a:solidFill>
                 <a:latin typeface="Tahoma"/>
               </a:rPr>
@@ -7359,7 +7496,7 @@
             <a:r>
               <a:rPr sz="1050" b="0" i="0">
                 <a:solidFill>
-                  <a:srgbClr val="2C5F2D"/>
+                  <a:srgbClr val="068734"/>
                 </a:solidFill>
                 <a:latin typeface="Tahoma"/>
               </a:rPr>
@@ -7383,7 +7520,7 @@
             <a:avLst/>
           </a:prstGeom>
           <a:solidFill>
-            <a:srgbClr val="ECF1E9"/>
+            <a:srgbClr val="F2F2F2"/>
           </a:solidFill>
           <a:ln w="6350">
             <a:solidFill>
@@ -7471,7 +7608,7 @@
             <a:avLst/>
           </a:prstGeom>
           <a:solidFill>
-            <a:srgbClr val="ECF1E9"/>
+            <a:srgbClr val="F2F2F2"/>
           </a:solidFill>
           <a:ln w="6350">
             <a:solidFill>
@@ -7535,7 +7672,7 @@
             <a:r>
               <a:rPr sz="1050" b="0" i="0">
                 <a:solidFill>
-                  <a:srgbClr val="2C5F2D"/>
+                  <a:srgbClr val="068734"/>
                 </a:solidFill>
                 <a:latin typeface="Tahoma"/>
               </a:rPr>
@@ -7623,7 +7760,7 @@
             <a:r>
               <a:rPr sz="1050" b="1" i="0">
                 <a:solidFill>
-                  <a:srgbClr val="C0561E"/>
+                  <a:srgbClr val="D95323"/>
                 </a:solidFill>
                 <a:latin typeface="Tahoma"/>
               </a:rPr>
@@ -7799,7 +7936,7 @@
             <a:r>
               <a:rPr sz="1050" b="0" i="0">
                 <a:solidFill>
-                  <a:srgbClr val="2C5F2D"/>
+                  <a:srgbClr val="068734"/>
                 </a:solidFill>
                 <a:latin typeface="Tahoma"/>
               </a:rPr>
@@ -7994,7 +8131,7 @@
             <a:r>
               <a:rPr sz="1050" b="0" i="0">
                 <a:solidFill>
-                  <a:srgbClr val="2C5F2D"/>
+                  <a:srgbClr val="068734"/>
                 </a:solidFill>
                 <a:latin typeface="Tahoma"/>
               </a:rPr>
@@ -8018,7 +8155,7 @@
             <a:avLst/>
           </a:prstGeom>
           <a:solidFill>
-            <a:srgbClr val="ECF1E9"/>
+            <a:srgbClr val="F2F2F2"/>
           </a:solidFill>
           <a:ln w="6350">
             <a:solidFill>
@@ -8082,7 +8219,7 @@
             <a:r>
               <a:rPr sz="1050" b="1" i="0">
                 <a:solidFill>
-                  <a:srgbClr val="C0561E"/>
+                  <a:srgbClr val="D95323"/>
                 </a:solidFill>
                 <a:latin typeface="Tahoma"/>
               </a:rPr>
@@ -8106,7 +8243,7 @@
             <a:avLst/>
           </a:prstGeom>
           <a:solidFill>
-            <a:srgbClr val="ECF1E9"/>
+            <a:srgbClr val="F2F2F2"/>
           </a:solidFill>
           <a:ln w="6350">
             <a:solidFill>
@@ -8194,7 +8331,7 @@
             <a:avLst/>
           </a:prstGeom>
           <a:solidFill>
-            <a:srgbClr val="ECF1E9"/>
+            <a:srgbClr val="F2F2F2"/>
           </a:solidFill>
           <a:ln w="6350">
             <a:solidFill>
@@ -8258,7 +8395,7 @@
             <a:r>
               <a:rPr sz="1050" b="0" i="0">
                 <a:solidFill>
-                  <a:srgbClr val="2C5F2D"/>
+                  <a:srgbClr val="068734"/>
                 </a:solidFill>
                 <a:latin typeface="Tahoma"/>
               </a:rPr>
@@ -8282,7 +8419,7 @@
             <a:avLst/>
           </a:prstGeom>
           <a:solidFill>
-            <a:srgbClr val="ECF1E9"/>
+            <a:srgbClr val="F2F2F2"/>
           </a:solidFill>
           <a:ln w="6350">
             <a:solidFill>
@@ -8370,7 +8507,7 @@
             <a:avLst/>
           </a:prstGeom>
           <a:solidFill>
-            <a:srgbClr val="ECF1E9"/>
+            <a:srgbClr val="F2F2F2"/>
           </a:solidFill>
           <a:ln w="6350">
             <a:solidFill>
@@ -8434,7 +8571,7 @@
             <a:r>
               <a:rPr sz="1050" b="0" i="0">
                 <a:solidFill>
-                  <a:srgbClr val="2C5F2D"/>
+                  <a:srgbClr val="068734"/>
                 </a:solidFill>
                 <a:latin typeface="Tahoma"/>
               </a:rPr>
@@ -8522,7 +8659,7 @@
             <a:r>
               <a:rPr sz="1050" b="1" i="0">
                 <a:solidFill>
-                  <a:srgbClr val="C0561E"/>
+                  <a:srgbClr val="D95323"/>
                 </a:solidFill>
                 <a:latin typeface="Tahoma"/>
               </a:rPr>
@@ -8698,7 +8835,7 @@
             <a:r>
               <a:rPr sz="1050" b="0" i="0">
                 <a:solidFill>
-                  <a:srgbClr val="2C5F2D"/>
+                  <a:srgbClr val="068734"/>
                 </a:solidFill>
                 <a:latin typeface="Tahoma"/>
               </a:rPr>
@@ -8874,7 +9011,7 @@
             <a:r>
               <a:rPr sz="1050" b="0" i="0">
                 <a:solidFill>
-                  <a:srgbClr val="2C5F2D"/>
+                  <a:srgbClr val="068734"/>
                 </a:solidFill>
                 <a:latin typeface="Tahoma"/>
               </a:rPr>
@@ -8898,7 +9035,7 @@
             <a:avLst/>
           </a:prstGeom>
           <a:solidFill>
-            <a:srgbClr val="ECF1E9"/>
+            <a:srgbClr val="F2F2F2"/>
           </a:solidFill>
           <a:ln w="6350">
             <a:solidFill>
@@ -8962,7 +9099,7 @@
             <a:r>
               <a:rPr sz="1050" b="1" i="0">
                 <a:solidFill>
-                  <a:srgbClr val="C0561E"/>
+                  <a:srgbClr val="D95323"/>
                 </a:solidFill>
                 <a:latin typeface="Tahoma"/>
               </a:rPr>
@@ -8986,7 +9123,7 @@
             <a:avLst/>
           </a:prstGeom>
           <a:solidFill>
-            <a:srgbClr val="ECF1E9"/>
+            <a:srgbClr val="F2F2F2"/>
           </a:solidFill>
           <a:ln w="6350">
             <a:solidFill>
@@ -9074,7 +9211,7 @@
             <a:avLst/>
           </a:prstGeom>
           <a:solidFill>
-            <a:srgbClr val="ECF1E9"/>
+            <a:srgbClr val="F2F2F2"/>
           </a:solidFill>
           <a:ln w="6350">
             <a:solidFill>
@@ -9138,7 +9275,7 @@
             <a:r>
               <a:rPr sz="1050" b="0" i="0">
                 <a:solidFill>
-                  <a:srgbClr val="2C5F2D"/>
+                  <a:srgbClr val="068734"/>
                 </a:solidFill>
                 <a:latin typeface="Tahoma"/>
               </a:rPr>
@@ -9162,7 +9299,7 @@
             <a:avLst/>
           </a:prstGeom>
           <a:solidFill>
-            <a:srgbClr val="ECF1E9"/>
+            <a:srgbClr val="F2F2F2"/>
           </a:solidFill>
           <a:ln w="6350">
             <a:solidFill>
@@ -9250,7 +9387,7 @@
             <a:avLst/>
           </a:prstGeom>
           <a:solidFill>
-            <a:srgbClr val="ECF1E9"/>
+            <a:srgbClr val="F2F2F2"/>
           </a:solidFill>
           <a:ln w="6350">
             <a:solidFill>
@@ -9314,7 +9451,7 @@
             <a:r>
               <a:rPr sz="1050" b="0" i="0">
                 <a:solidFill>
-                  <a:srgbClr val="2C5F2D"/>
+                  <a:srgbClr val="068734"/>
                 </a:solidFill>
                 <a:latin typeface="Tahoma"/>
               </a:rPr>
@@ -9356,7 +9493,7 @@
             <a:r>
               <a:rPr sz="1200" b="1" i="0">
                 <a:solidFill>
-                  <a:srgbClr val="C0561E"/>
+                  <a:srgbClr val="D95323"/>
                 </a:solidFill>
                 <a:latin typeface="Tahoma"/>
               </a:rPr>
@@ -9367,7 +9504,7 @@
       </p:sp>
       <p:pic>
         <p:nvPicPr>
-          <p:cNvPr id="85" name="Picture 84" descr="logo_footer.png"/>
+          <p:cNvPr id="85" name="Picture 84" descr="logo_r01.png"/>
           <p:cNvPicPr>
             <a:picLocks noChangeAspect="1"/>
           </p:cNvPicPr>
@@ -9381,8 +9518,8 @@
         </p:blipFill>
         <p:spPr>
           <a:xfrm>
-            <a:off x="384048" y="6327648"/>
-            <a:ext cx="365760" cy="384048"/>
+            <a:off x="249631" y="6448348"/>
+            <a:ext cx="237744" cy="237744"/>
           </a:xfrm>
           <a:prstGeom prst="rect">
             <a:avLst/>
@@ -9397,8 +9534,8 @@
         </p:nvSpPr>
         <p:spPr>
           <a:xfrm>
-            <a:off x="786384" y="6327648"/>
-            <a:ext cx="4114800" cy="411480"/>
+            <a:off x="566928" y="6353251"/>
+            <a:ext cx="3246120" cy="400507"/>
           </a:xfrm>
           <a:prstGeom prst="rect">
             <a:avLst/>
@@ -9420,9 +9557,9 @@
               </a:spcAft>
             </a:pPr>
             <a:r>
-              <a:rPr sz="1300" b="1" i="0">
-                <a:solidFill>
-                  <a:srgbClr val="0D3D14"/>
+              <a:rPr sz="2000" b="1" i="0">
+                <a:solidFill>
+                  <a:srgbClr val="068734"/>
                 </a:solidFill>
                 <a:latin typeface="Tahoma"/>
               </a:rPr>
@@ -9439,8 +9576,8 @@
         </p:nvSpPr>
         <p:spPr>
           <a:xfrm>
-            <a:off x="11430000" y="6355080"/>
-            <a:ext cx="594360" cy="365760"/>
+            <a:off x="9400032" y="6510528"/>
+            <a:ext cx="2514600" cy="292608"/>
           </a:xfrm>
           <a:prstGeom prst="rect">
             <a:avLst/>
@@ -9448,7 +9585,7 @@
           <a:noFill/>
         </p:spPr>
         <p:txBody>
-          <a:bodyPr wrap="square" anchor="ctr" lIns="27432" rIns="27432" tIns="9144" bIns="9144">
+          <a:bodyPr wrap="square" anchor="t" lIns="27432" rIns="27432" tIns="9144" bIns="9144">
             <a:spAutoFit/>
           </a:bodyPr>
           <a:lstStyle/>
@@ -9464,7 +9601,7 @@
             <a:r>
               <a:rPr sz="1200" b="0" i="0">
                 <a:solidFill>
-                  <a:srgbClr val="555555"/>
+                  <a:srgbClr val="068734"/>
                 </a:solidFill>
                 <a:latin typeface="Tahoma"/>
               </a:rPr>
@@ -9499,8 +9636,8 @@
         </p:nvSpPr>
         <p:spPr>
           <a:xfrm>
-            <a:off x="457200" y="256032"/>
-            <a:ext cx="10881360" cy="868680"/>
+            <a:off x="256032" y="256032"/>
+            <a:ext cx="11430000" cy="649224"/>
           </a:xfrm>
           <a:prstGeom prst="rect">
             <a:avLst/>
@@ -9508,7 +9645,7 @@
           <a:noFill/>
         </p:spPr>
         <p:txBody>
-          <a:bodyPr wrap="square" anchor="ctr" lIns="27432" rIns="27432" tIns="9144" bIns="9144">
+          <a:bodyPr wrap="square" anchor="t" lIns="27432" rIns="27432" tIns="9144" bIns="9144">
             <a:spAutoFit/>
           </a:bodyPr>
           <a:lstStyle/>
@@ -9522,9 +9659,9 @@
               </a:spcAft>
             </a:pPr>
             <a:r>
-              <a:rPr sz="3400" b="1" i="0">
-                <a:solidFill>
-                  <a:srgbClr val="0D3D14"/>
+              <a:rPr sz="3600" b="1" i="0">
+                <a:solidFill>
+                  <a:srgbClr val="068734"/>
                 </a:solidFill>
                 <a:latin typeface="Tahoma"/>
               </a:rPr>
@@ -9541,8 +9678,8 @@
         </p:nvSpPr>
         <p:spPr>
           <a:xfrm>
-            <a:off x="502920" y="1024128"/>
-            <a:ext cx="10881360" cy="457200"/>
+            <a:off x="384048" y="960120"/>
+            <a:ext cx="11247120" cy="402336"/>
           </a:xfrm>
           <a:prstGeom prst="rect">
             <a:avLst/>
@@ -9564,9 +9701,9 @@
               </a:spcAft>
             </a:pPr>
             <a:r>
-              <a:rPr sz="1900" b="1" i="0">
-                <a:solidFill>
-                  <a:srgbClr val="2C5F2D"/>
+              <a:rPr sz="1500" b="1" i="0">
+                <a:solidFill>
+                  <a:srgbClr val="068734"/>
                 </a:solidFill>
                 <a:latin typeface="Tahoma"/>
               </a:rPr>
@@ -9601,7 +9738,7 @@
           <a:effectLst>
             <a:outerShdw blurRad="50000" dist="20000" dir="5400000" rotWithShape="0">
               <a:srgbClr val="8A99AD">
-                <a:alpha val="38000"/>
+                <a:alpha val="30000"/>
               </a:srgbClr>
             </a:outerShdw>
           </a:effectLst>
@@ -9661,7 +9798,7 @@
             <a:r>
               <a:rPr sz="3000" b="1" i="0">
                 <a:solidFill>
-                  <a:srgbClr val="2C5F2D"/>
+                  <a:srgbClr val="068734"/>
                 </a:solidFill>
                 <a:latin typeface="Tahoma"/>
               </a:rPr>
@@ -9738,7 +9875,7 @@
           <a:effectLst>
             <a:outerShdw blurRad="50000" dist="20000" dir="5400000" rotWithShape="0">
               <a:srgbClr val="8A99AD">
-                <a:alpha val="38000"/>
+                <a:alpha val="30000"/>
               </a:srgbClr>
             </a:outerShdw>
           </a:effectLst>
@@ -9798,7 +9935,7 @@
             <a:r>
               <a:rPr sz="3000" b="1" i="0">
                 <a:solidFill>
-                  <a:srgbClr val="C0561E"/>
+                  <a:srgbClr val="D95323"/>
                 </a:solidFill>
                 <a:latin typeface="Tahoma"/>
               </a:rPr>
@@ -9875,7 +10012,7 @@
           <a:effectLst>
             <a:outerShdw blurRad="50000" dist="20000" dir="5400000" rotWithShape="0">
               <a:srgbClr val="8A99AD">
-                <a:alpha val="38000"/>
+                <a:alpha val="30000"/>
               </a:srgbClr>
             </a:outerShdw>
           </a:effectLst>
@@ -10012,7 +10149,7 @@
           <a:effectLst>
             <a:outerShdw blurRad="50000" dist="20000" dir="5400000" rotWithShape="0">
               <a:srgbClr val="8A99AD">
-                <a:alpha val="38000"/>
+                <a:alpha val="30000"/>
               </a:srgbClr>
             </a:outerShdw>
           </a:effectLst>
@@ -10072,7 +10209,7 @@
             <a:r>
               <a:rPr sz="3000" b="1" i="0">
                 <a:solidFill>
-                  <a:srgbClr val="2C5F2D"/>
+                  <a:srgbClr val="068734"/>
                 </a:solidFill>
                 <a:latin typeface="Tahoma"/>
               </a:rPr>
@@ -10138,7 +10275,7 @@
             <a:avLst/>
           </a:prstGeom>
           <a:solidFill>
-            <a:srgbClr val="2C5F2D"/>
+            <a:srgbClr val="068734"/>
           </a:solidFill>
           <a:ln>
             <a:noFill/>
@@ -10200,7 +10337,7 @@
             <a:r>
               <a:rPr sz="1450" b="1" i="0">
                 <a:solidFill>
-                  <a:srgbClr val="2C5F2D"/>
+                  <a:srgbClr val="068734"/>
                 </a:solidFill>
                 <a:latin typeface="Tahoma"/>
               </a:rPr>
@@ -10266,7 +10403,7 @@
             <a:avLst/>
           </a:prstGeom>
           <a:solidFill>
-            <a:srgbClr val="C0561E"/>
+            <a:srgbClr val="D95323"/>
           </a:solidFill>
           <a:ln>
             <a:noFill/>
@@ -10328,7 +10465,7 @@
             <a:r>
               <a:rPr sz="1450" b="1" i="0">
                 <a:solidFill>
-                  <a:srgbClr val="C0561E"/>
+                  <a:srgbClr val="D95323"/>
                 </a:solidFill>
                 <a:latin typeface="Tahoma"/>
               </a:rPr>
@@ -10522,7 +10659,7 @@
             <a:avLst/>
           </a:prstGeom>
           <a:solidFill>
-            <a:srgbClr val="C0561E"/>
+            <a:srgbClr val="D95323"/>
           </a:solidFill>
           <a:ln>
             <a:noFill/>
@@ -10584,7 +10721,7 @@
             <a:r>
               <a:rPr sz="1450" b="1" i="0">
                 <a:solidFill>
-                  <a:srgbClr val="C0561E"/>
+                  <a:srgbClr val="D95323"/>
                 </a:solidFill>
                 <a:latin typeface="Tahoma"/>
               </a:rPr>
@@ -10637,7 +10774,7 @@
       </p:sp>
       <p:pic>
         <p:nvPicPr>
-          <p:cNvPr id="28" name="Picture 27" descr="logo_footer.png"/>
+          <p:cNvPr id="28" name="Picture 27" descr="logo_r01.png"/>
           <p:cNvPicPr>
             <a:picLocks noChangeAspect="1"/>
           </p:cNvPicPr>
@@ -10651,8 +10788,8 @@
         </p:blipFill>
         <p:spPr>
           <a:xfrm>
-            <a:off x="384048" y="6327648"/>
-            <a:ext cx="365760" cy="384048"/>
+            <a:off x="249631" y="6448348"/>
+            <a:ext cx="237744" cy="237744"/>
           </a:xfrm>
           <a:prstGeom prst="rect">
             <a:avLst/>
@@ -10667,8 +10804,8 @@
         </p:nvSpPr>
         <p:spPr>
           <a:xfrm>
-            <a:off x="786384" y="6327648"/>
-            <a:ext cx="4114800" cy="411480"/>
+            <a:off x="566928" y="6353251"/>
+            <a:ext cx="3246120" cy="400507"/>
           </a:xfrm>
           <a:prstGeom prst="rect">
             <a:avLst/>
@@ -10690,9 +10827,9 @@
               </a:spcAft>
             </a:pPr>
             <a:r>
-              <a:rPr sz="1300" b="1" i="0">
-                <a:solidFill>
-                  <a:srgbClr val="0D3D14"/>
+              <a:rPr sz="2000" b="1" i="0">
+                <a:solidFill>
+                  <a:srgbClr val="068734"/>
                 </a:solidFill>
                 <a:latin typeface="Tahoma"/>
               </a:rPr>
@@ -10709,8 +10846,8 @@
         </p:nvSpPr>
         <p:spPr>
           <a:xfrm>
-            <a:off x="11430000" y="6355080"/>
-            <a:ext cx="594360" cy="365760"/>
+            <a:off x="9400032" y="6510528"/>
+            <a:ext cx="2514600" cy="292608"/>
           </a:xfrm>
           <a:prstGeom prst="rect">
             <a:avLst/>
@@ -10718,7 +10855,7 @@
           <a:noFill/>
         </p:spPr>
         <p:txBody>
-          <a:bodyPr wrap="square" anchor="ctr" lIns="27432" rIns="27432" tIns="9144" bIns="9144">
+          <a:bodyPr wrap="square" anchor="t" lIns="27432" rIns="27432" tIns="9144" bIns="9144">
             <a:spAutoFit/>
           </a:bodyPr>
           <a:lstStyle/>
@@ -10734,7 +10871,7 @@
             <a:r>
               <a:rPr sz="1200" b="0" i="0">
                 <a:solidFill>
-                  <a:srgbClr val="555555"/>
+                  <a:srgbClr val="068734"/>
                 </a:solidFill>
                 <a:latin typeface="Tahoma"/>
               </a:rPr>
@@ -10769,8 +10906,8 @@
         </p:nvSpPr>
         <p:spPr>
           <a:xfrm>
-            <a:off x="457200" y="256032"/>
-            <a:ext cx="10881360" cy="868680"/>
+            <a:off x="256032" y="256032"/>
+            <a:ext cx="11430000" cy="649224"/>
           </a:xfrm>
           <a:prstGeom prst="rect">
             <a:avLst/>
@@ -10778,7 +10915,7 @@
           <a:noFill/>
         </p:spPr>
         <p:txBody>
-          <a:bodyPr wrap="square" anchor="ctr" lIns="27432" rIns="27432" tIns="9144" bIns="9144">
+          <a:bodyPr wrap="square" anchor="t" lIns="27432" rIns="27432" tIns="9144" bIns="9144">
             <a:spAutoFit/>
           </a:bodyPr>
           <a:lstStyle/>
@@ -10792,9 +10929,9 @@
               </a:spcAft>
             </a:pPr>
             <a:r>
-              <a:rPr sz="3400" b="1" i="0">
-                <a:solidFill>
-                  <a:srgbClr val="0D3D14"/>
+              <a:rPr sz="3350" b="1" i="0">
+                <a:solidFill>
+                  <a:srgbClr val="068734"/>
                 </a:solidFill>
                 <a:latin typeface="Tahoma"/>
               </a:rPr>
@@ -10811,8 +10948,8 @@
         </p:nvSpPr>
         <p:spPr>
           <a:xfrm>
-            <a:off x="502920" y="1024128"/>
-            <a:ext cx="10881360" cy="457200"/>
+            <a:off x="384048" y="960120"/>
+            <a:ext cx="11247120" cy="402336"/>
           </a:xfrm>
           <a:prstGeom prst="rect">
             <a:avLst/>
@@ -10834,9 +10971,9 @@
               </a:spcAft>
             </a:pPr>
             <a:r>
-              <a:rPr sz="1900" b="1" i="0">
-                <a:solidFill>
-                  <a:srgbClr val="2C5F2D"/>
+              <a:rPr sz="1750" b="1" i="0">
+                <a:solidFill>
+                  <a:srgbClr val="068734"/>
                 </a:solidFill>
                 <a:latin typeface="Tahoma"/>
               </a:rPr>
@@ -10946,7 +11083,7 @@
             <a:avLst/>
           </a:prstGeom>
           <a:solidFill>
-            <a:srgbClr val="C0561E"/>
+            <a:srgbClr val="D95323"/>
           </a:solidFill>
           <a:ln>
             <a:noFill/>
@@ -11032,7 +11169,7 @@
             <a:avLst/>
           </a:prstGeom>
           <a:solidFill>
-            <a:srgbClr val="ECF1E9"/>
+            <a:srgbClr val="F2F2F2"/>
           </a:solidFill>
           <a:ln w="6350">
             <a:solidFill>
@@ -11138,7 +11275,7 @@
             <a:r>
               <a:rPr sz="1150" b="1" i="0">
                 <a:solidFill>
-                  <a:srgbClr val="2C5F2D"/>
+                  <a:srgbClr val="068734"/>
                 </a:solidFill>
                 <a:latin typeface="Tahoma"/>
               </a:rPr>
@@ -11268,7 +11405,7 @@
             <a:r>
               <a:rPr sz="1150" b="1" i="0">
                 <a:solidFill>
-                  <a:srgbClr val="2C5F2D"/>
+                  <a:srgbClr val="068734"/>
                 </a:solidFill>
                 <a:latin typeface="Tahoma"/>
               </a:rPr>
@@ -11292,7 +11429,7 @@
             <a:avLst/>
           </a:prstGeom>
           <a:solidFill>
-            <a:srgbClr val="ECF1E9"/>
+            <a:srgbClr val="F2F2F2"/>
           </a:solidFill>
           <a:ln w="6350">
             <a:solidFill>
@@ -11398,7 +11535,7 @@
             <a:r>
               <a:rPr sz="1150" b="1" i="0">
                 <a:solidFill>
-                  <a:srgbClr val="2C5F2D"/>
+                  <a:srgbClr val="068734"/>
                 </a:solidFill>
                 <a:latin typeface="Tahoma"/>
               </a:rPr>
@@ -11528,7 +11665,7 @@
             <a:r>
               <a:rPr sz="1150" b="1" i="0">
                 <a:solidFill>
-                  <a:srgbClr val="2C5F2D"/>
+                  <a:srgbClr val="068734"/>
                 </a:solidFill>
                 <a:latin typeface="Tahoma"/>
               </a:rPr>
@@ -11552,7 +11689,7 @@
             <a:avLst/>
           </a:prstGeom>
           <a:solidFill>
-            <a:srgbClr val="ECF1E9"/>
+            <a:srgbClr val="F2F2F2"/>
           </a:solidFill>
           <a:ln w="6350">
             <a:solidFill>
@@ -11658,7 +11795,7 @@
             <a:r>
               <a:rPr sz="1150" b="1" i="0">
                 <a:solidFill>
-                  <a:srgbClr val="2C5F2D"/>
+                  <a:srgbClr val="068734"/>
                 </a:solidFill>
                 <a:latin typeface="Tahoma"/>
               </a:rPr>
@@ -11788,7 +11925,7 @@
             <a:r>
               <a:rPr sz="1150" b="1" i="0">
                 <a:solidFill>
-                  <a:srgbClr val="2C5F2D"/>
+                  <a:srgbClr val="068734"/>
                 </a:solidFill>
                 <a:latin typeface="Tahoma"/>
               </a:rPr>
@@ -11812,7 +11949,7 @@
             <a:avLst/>
           </a:prstGeom>
           <a:solidFill>
-            <a:srgbClr val="ECF1E9"/>
+            <a:srgbClr val="F2F2F2"/>
           </a:solidFill>
           <a:ln w="6350">
             <a:solidFill>
@@ -11918,7 +12055,7 @@
             <a:r>
               <a:rPr sz="1150" b="1" i="0">
                 <a:solidFill>
-                  <a:srgbClr val="C0561E"/>
+                  <a:srgbClr val="D95323"/>
                 </a:solidFill>
                 <a:latin typeface="Tahoma"/>
               </a:rPr>
@@ -12048,7 +12185,7 @@
             <a:r>
               <a:rPr sz="1150" b="1" i="0">
                 <a:solidFill>
-                  <a:srgbClr val="C0561E"/>
+                  <a:srgbClr val="D95323"/>
                 </a:solidFill>
                 <a:latin typeface="Tahoma"/>
               </a:rPr>
@@ -12072,7 +12209,7 @@
             <a:avLst/>
           </a:prstGeom>
           <a:solidFill>
-            <a:srgbClr val="ECF1E9"/>
+            <a:srgbClr val="F2F2F2"/>
           </a:solidFill>
           <a:ln w="6350">
             <a:solidFill>
@@ -12178,7 +12315,7 @@
             <a:r>
               <a:rPr sz="1150" b="1" i="0">
                 <a:solidFill>
-                  <a:srgbClr val="C0561E"/>
+                  <a:srgbClr val="D95323"/>
                 </a:solidFill>
                 <a:latin typeface="Tahoma"/>
               </a:rPr>
@@ -12308,7 +12445,7 @@
             <a:r>
               <a:rPr sz="1150" b="1" i="0">
                 <a:solidFill>
-                  <a:srgbClr val="C0561E"/>
+                  <a:srgbClr val="D95323"/>
                 </a:solidFill>
                 <a:latin typeface="Tahoma"/>
               </a:rPr>
@@ -12332,7 +12469,7 @@
             <a:avLst/>
           </a:prstGeom>
           <a:solidFill>
-            <a:srgbClr val="ECF1E9"/>
+            <a:srgbClr val="F2F2F2"/>
           </a:solidFill>
           <a:ln w="6350">
             <a:solidFill>
@@ -12438,7 +12575,7 @@
             <a:r>
               <a:rPr sz="1150" b="1" i="0">
                 <a:solidFill>
-                  <a:srgbClr val="C0561E"/>
+                  <a:srgbClr val="D95323"/>
                 </a:solidFill>
                 <a:latin typeface="Tahoma"/>
               </a:rPr>
@@ -12568,7 +12705,7 @@
             <a:r>
               <a:rPr sz="1150" b="1" i="0">
                 <a:solidFill>
-                  <a:srgbClr val="C0561E"/>
+                  <a:srgbClr val="D95323"/>
                 </a:solidFill>
                 <a:latin typeface="Tahoma"/>
               </a:rPr>
@@ -12596,7 +12733,7 @@
           </a:solidFill>
           <a:ln w="19050">
             <a:solidFill>
-              <a:srgbClr val="C0561E"/>
+              <a:srgbClr val="D95323"/>
             </a:solidFill>
           </a:ln>
           <a:effectLst/>
@@ -12656,7 +12793,7 @@
             <a:r>
               <a:rPr sz="1400" b="1" i="0">
                 <a:solidFill>
-                  <a:srgbClr val="C0561E"/>
+                  <a:srgbClr val="D95323"/>
                 </a:solidFill>
                 <a:latin typeface="Tahoma"/>
               </a:rPr>
@@ -12815,7 +12952,7 @@
       </p:sp>
       <p:pic>
         <p:nvPicPr>
-          <p:cNvPr id="48" name="Picture 47" descr="logo_footer.png"/>
+          <p:cNvPr id="48" name="Picture 47" descr="logo_r01.png"/>
           <p:cNvPicPr>
             <a:picLocks noChangeAspect="1"/>
           </p:cNvPicPr>
@@ -12829,8 +12966,8 @@
         </p:blipFill>
         <p:spPr>
           <a:xfrm>
-            <a:off x="384048" y="6327648"/>
-            <a:ext cx="365760" cy="384048"/>
+            <a:off x="249631" y="6448348"/>
+            <a:ext cx="237744" cy="237744"/>
           </a:xfrm>
           <a:prstGeom prst="rect">
             <a:avLst/>
@@ -12845,8 +12982,8 @@
         </p:nvSpPr>
         <p:spPr>
           <a:xfrm>
-            <a:off x="786384" y="6327648"/>
-            <a:ext cx="4114800" cy="411480"/>
+            <a:off x="566928" y="6353251"/>
+            <a:ext cx="3246120" cy="400507"/>
           </a:xfrm>
           <a:prstGeom prst="rect">
             <a:avLst/>
@@ -12868,9 +13005,9 @@
               </a:spcAft>
             </a:pPr>
             <a:r>
-              <a:rPr sz="1300" b="1" i="0">
-                <a:solidFill>
-                  <a:srgbClr val="0D3D14"/>
+              <a:rPr sz="2000" b="1" i="0">
+                <a:solidFill>
+                  <a:srgbClr val="068734"/>
                 </a:solidFill>
                 <a:latin typeface="Tahoma"/>
               </a:rPr>
@@ -12887,8 +13024,8 @@
         </p:nvSpPr>
         <p:spPr>
           <a:xfrm>
-            <a:off x="11430000" y="6355080"/>
-            <a:ext cx="594360" cy="365760"/>
+            <a:off x="9400032" y="6510528"/>
+            <a:ext cx="2514600" cy="292608"/>
           </a:xfrm>
           <a:prstGeom prst="rect">
             <a:avLst/>
@@ -12896,7 +13033,7 @@
           <a:noFill/>
         </p:spPr>
         <p:txBody>
-          <a:bodyPr wrap="square" anchor="ctr" lIns="27432" rIns="27432" tIns="9144" bIns="9144">
+          <a:bodyPr wrap="square" anchor="t" lIns="27432" rIns="27432" tIns="9144" bIns="9144">
             <a:spAutoFit/>
           </a:bodyPr>
           <a:lstStyle/>
@@ -12912,7 +13049,7 @@
             <a:r>
               <a:rPr sz="1200" b="0" i="0">
                 <a:solidFill>
-                  <a:srgbClr val="555555"/>
+                  <a:srgbClr val="068734"/>
                 </a:solidFill>
                 <a:latin typeface="Tahoma"/>
               </a:rPr>
@@ -12947,8 +13084,8 @@
         </p:nvSpPr>
         <p:spPr>
           <a:xfrm>
-            <a:off x="457200" y="256032"/>
-            <a:ext cx="10881360" cy="868680"/>
+            <a:off x="256032" y="256032"/>
+            <a:ext cx="11430000" cy="649224"/>
           </a:xfrm>
           <a:prstGeom prst="rect">
             <a:avLst/>
@@ -12956,7 +13093,7 @@
           <a:noFill/>
         </p:spPr>
         <p:txBody>
-          <a:bodyPr wrap="square" anchor="ctr" lIns="27432" rIns="27432" tIns="9144" bIns="9144">
+          <a:bodyPr wrap="square" anchor="t" lIns="27432" rIns="27432" tIns="9144" bIns="9144">
             <a:spAutoFit/>
           </a:bodyPr>
           <a:lstStyle/>
@@ -12970,9 +13107,9 @@
               </a:spcAft>
             </a:pPr>
             <a:r>
-              <a:rPr sz="3400" b="1" i="0">
-                <a:solidFill>
-                  <a:srgbClr val="0D3D14"/>
+              <a:rPr sz="3600" b="1" i="0">
+                <a:solidFill>
+                  <a:srgbClr val="068734"/>
                 </a:solidFill>
                 <a:latin typeface="Tahoma"/>
               </a:rPr>
@@ -12989,8 +13126,8 @@
         </p:nvSpPr>
         <p:spPr>
           <a:xfrm>
-            <a:off x="502920" y="1024128"/>
-            <a:ext cx="10881360" cy="457200"/>
+            <a:off x="384048" y="960120"/>
+            <a:ext cx="11247120" cy="402336"/>
           </a:xfrm>
           <a:prstGeom prst="rect">
             <a:avLst/>
@@ -13012,9 +13149,9 @@
               </a:spcAft>
             </a:pPr>
             <a:r>
-              <a:rPr sz="1900" b="1" i="0">
-                <a:solidFill>
-                  <a:srgbClr val="2C5F2D"/>
+              <a:rPr sz="2000" b="1" i="0">
+                <a:solidFill>
+                  <a:srgbClr val="068734"/>
                 </a:solidFill>
                 <a:latin typeface="Tahoma"/>
               </a:rPr>
@@ -13084,7 +13221,7 @@
             <a:avLst/>
           </a:prstGeom>
           <a:solidFill>
-            <a:srgbClr val="C0561E"/>
+            <a:srgbClr val="D95323"/>
           </a:solidFill>
           <a:ln>
             <a:noFill/>
@@ -13128,7 +13265,7 @@
             <a:avLst/>
           </a:prstGeom>
           <a:solidFill>
-            <a:srgbClr val="C0561E"/>
+            <a:srgbClr val="D95323"/>
           </a:solidFill>
           <a:ln>
             <a:noFill/>
@@ -13317,7 +13454,7 @@
             <a:avLst/>
           </a:prstGeom>
           <a:solidFill>
-            <a:srgbClr val="C0561E"/>
+            <a:srgbClr val="D95323"/>
           </a:solidFill>
           <a:ln>
             <a:noFill/>
@@ -13449,7 +13586,7 @@
             <a:avLst/>
           </a:prstGeom>
           <a:solidFill>
-            <a:srgbClr val="C0561E"/>
+            <a:srgbClr val="D95323"/>
           </a:solidFill>
           <a:ln>
             <a:noFill/>
@@ -13493,7 +13630,7 @@
             <a:avLst/>
           </a:prstGeom>
           <a:solidFill>
-            <a:srgbClr val="C0561E"/>
+            <a:srgbClr val="D95323"/>
           </a:solidFill>
           <a:ln>
             <a:noFill/>
@@ -13663,7 +13800,7 @@
             <a:avLst/>
           </a:prstGeom>
           <a:solidFill>
-            <a:srgbClr val="C0561E"/>
+            <a:srgbClr val="D95323"/>
           </a:solidFill>
           <a:ln>
             <a:noFill/>
@@ -14141,7 +14278,7 @@
             <a:avLst/>
           </a:prstGeom>
           <a:solidFill>
-            <a:srgbClr val="2C5F2D"/>
+            <a:srgbClr val="068734"/>
           </a:solidFill>
           <a:ln>
             <a:noFill/>
@@ -14185,7 +14322,7 @@
             <a:avLst/>
           </a:prstGeom>
           <a:solidFill>
-            <a:srgbClr val="2C5F2D"/>
+            <a:srgbClr val="068734"/>
           </a:solidFill>
           <a:ln>
             <a:noFill/>
@@ -14355,7 +14492,7 @@
             <a:avLst/>
           </a:prstGeom>
           <a:solidFill>
-            <a:srgbClr val="2C5F2D"/>
+            <a:srgbClr val="068734"/>
           </a:solidFill>
           <a:ln>
             <a:noFill/>
@@ -14487,7 +14624,7 @@
             <a:avLst/>
           </a:prstGeom>
           <a:solidFill>
-            <a:srgbClr val="2C5F2D"/>
+            <a:srgbClr val="068734"/>
           </a:solidFill>
           <a:ln>
             <a:noFill/>
@@ -14531,7 +14668,7 @@
             <a:avLst/>
           </a:prstGeom>
           <a:solidFill>
-            <a:srgbClr val="2C5F2D"/>
+            <a:srgbClr val="068734"/>
           </a:solidFill>
           <a:ln>
             <a:noFill/>
@@ -14701,7 +14838,7 @@
             <a:avLst/>
           </a:prstGeom>
           <a:solidFill>
-            <a:srgbClr val="2C5F2D"/>
+            <a:srgbClr val="068734"/>
           </a:solidFill>
           <a:ln>
             <a:noFill/>
@@ -15120,7 +15257,7 @@
       </p:sp>
       <p:pic>
         <p:nvPicPr>
-          <p:cNvPr id="52" name="Picture 51" descr="logo_footer.png"/>
+          <p:cNvPr id="52" name="Picture 51" descr="logo_r01.png"/>
           <p:cNvPicPr>
             <a:picLocks noChangeAspect="1"/>
           </p:cNvPicPr>
@@ -15134,8 +15271,8 @@
         </p:blipFill>
         <p:spPr>
           <a:xfrm>
-            <a:off x="384048" y="6327648"/>
-            <a:ext cx="365760" cy="384048"/>
+            <a:off x="249631" y="6448348"/>
+            <a:ext cx="237744" cy="237744"/>
           </a:xfrm>
           <a:prstGeom prst="rect">
             <a:avLst/>
@@ -15150,8 +15287,8 @@
         </p:nvSpPr>
         <p:spPr>
           <a:xfrm>
-            <a:off x="786384" y="6327648"/>
-            <a:ext cx="4114800" cy="411480"/>
+            <a:off x="566928" y="6353251"/>
+            <a:ext cx="3246120" cy="400507"/>
           </a:xfrm>
           <a:prstGeom prst="rect">
             <a:avLst/>
@@ -15173,9 +15310,9 @@
               </a:spcAft>
             </a:pPr>
             <a:r>
-              <a:rPr sz="1300" b="1" i="0">
-                <a:solidFill>
-                  <a:srgbClr val="0D3D14"/>
+              <a:rPr sz="2000" b="1" i="0">
+                <a:solidFill>
+                  <a:srgbClr val="068734"/>
                 </a:solidFill>
                 <a:latin typeface="Tahoma"/>
               </a:rPr>
@@ -15192,8 +15329,8 @@
         </p:nvSpPr>
         <p:spPr>
           <a:xfrm>
-            <a:off x="11430000" y="6355080"/>
-            <a:ext cx="594360" cy="365760"/>
+            <a:off x="9400032" y="6510528"/>
+            <a:ext cx="2514600" cy="292608"/>
           </a:xfrm>
           <a:prstGeom prst="rect">
             <a:avLst/>
@@ -15201,7 +15338,7 @@
           <a:noFill/>
         </p:spPr>
         <p:txBody>
-          <a:bodyPr wrap="square" anchor="ctr" lIns="27432" rIns="27432" tIns="9144" bIns="9144">
+          <a:bodyPr wrap="square" anchor="t" lIns="27432" rIns="27432" tIns="9144" bIns="9144">
             <a:spAutoFit/>
           </a:bodyPr>
           <a:lstStyle/>
@@ -15217,7 +15354,7 @@
             <a:r>
               <a:rPr sz="1200" b="0" i="0">
                 <a:solidFill>
-                  <a:srgbClr val="555555"/>
+                  <a:srgbClr val="068734"/>
                 </a:solidFill>
                 <a:latin typeface="Tahoma"/>
               </a:rPr>
@@ -15246,45 +15383,43 @@
       <p:grpSpPr/>
       <p:sp>
         <p:nvSpPr>
-          <p:cNvPr id="2" name="Rectangle 1"/>
-          <p:cNvSpPr/>
-          <p:nvPr/>
-        </p:nvSpPr>
-        <p:spPr>
-          <a:xfrm>
-            <a:off x="0" y="0"/>
-            <a:ext cx="12191695" cy="6858000"/>
-          </a:xfrm>
-          <a:prstGeom prst="rect">
-            <a:avLst/>
-          </a:prstGeom>
-          <a:solidFill>
-            <a:srgbClr val="0D3D14"/>
-          </a:solidFill>
-          <a:ln>
-            <a:noFill/>
-          </a:ln>
-          <a:effectLst/>
-        </p:spPr>
-        <p:style>
-          <a:lnRef idx="1">
-            <a:schemeClr val="accent1"/>
-          </a:lnRef>
-          <a:fillRef idx="3">
-            <a:schemeClr val="accent1"/>
-          </a:fillRef>
-          <a:effectRef idx="2">
-            <a:schemeClr val="accent1"/>
-          </a:effectRef>
-          <a:fontRef idx="minor">
-            <a:schemeClr val="lt1"/>
-          </a:fontRef>
-        </p:style>
-        <p:txBody>
-          <a:bodyPr rtlCol="0" anchor="ctr"/>
-          <a:lstStyle/>
-          <a:p>
-            <a:pPr algn="ctr"/>
+          <p:cNvPr id="2" name="TextBox 1"/>
+          <p:cNvSpPr txBox="1"/>
+          <p:nvPr/>
+        </p:nvSpPr>
+        <p:spPr>
+          <a:xfrm>
+            <a:off x="822960" y="2779776"/>
+            <a:ext cx="10552176" cy="649224"/>
+          </a:xfrm>
+          <a:prstGeom prst="rect">
+            <a:avLst/>
+          </a:prstGeom>
+          <a:noFill/>
+        </p:spPr>
+        <p:txBody>
+          <a:bodyPr wrap="square" anchor="ctr" lIns="27432" rIns="27432" tIns="9144" bIns="9144">
+            <a:spAutoFit/>
+          </a:bodyPr>
+          <a:lstStyle/>
+          <a:p>
+            <a:pPr algn="ctr">
+              <a:spcBef>
+                <a:spcPts val="0"/>
+              </a:spcBef>
+              <a:spcAft>
+                <a:spcPts val="200"/>
+              </a:spcAft>
+            </a:pPr>
+            <a:r>
+              <a:rPr sz="3250" b="1" i="0">
+                <a:solidFill>
+                  <a:srgbClr val="068734"/>
+                </a:solidFill>
+                <a:latin typeface="Tahoma"/>
+              </a:rPr>
+              <a:t>ของทุกชิ้นที่เข้าไลน์ ต้องมีใบในระบบ</a:t>
+            </a:r>
           </a:p>
         </p:txBody>
       </p:sp>
@@ -15296,8 +15431,158 @@
         </p:nvSpPr>
         <p:spPr>
           <a:xfrm>
-            <a:off x="914400" y="2331720"/>
-            <a:ext cx="10332720" cy="822960"/>
+            <a:off x="822960" y="3611880"/>
+            <a:ext cx="10552176" cy="457200"/>
+          </a:xfrm>
+          <a:prstGeom prst="rect">
+            <a:avLst/>
+          </a:prstGeom>
+          <a:noFill/>
+        </p:spPr>
+        <p:txBody>
+          <a:bodyPr wrap="square" anchor="ctr" lIns="27432" rIns="27432" tIns="9144" bIns="9144">
+            <a:spAutoFit/>
+          </a:bodyPr>
+          <a:lstStyle/>
+          <a:p>
+            <a:pPr algn="ctr">
+              <a:spcBef>
+                <a:spcPts val="0"/>
+              </a:spcBef>
+              <a:spcAft>
+                <a:spcPts val="200"/>
+              </a:spcAft>
+            </a:pPr>
+            <a:r>
+              <a:rPr sz="2200" b="1" i="0">
+                <a:solidFill>
+                  <a:srgbClr val="D95323"/>
+                </a:solidFill>
+                <a:latin typeface="Tahoma"/>
+              </a:rPr>
+              <a:t>ไม่มีใบ = วัดไม่ได้ว่าช้าตรงไหน = แก้ไม่ได้</a:t>
+            </a:r>
+          </a:p>
+        </p:txBody>
+      </p:sp>
+      <p:sp>
+        <p:nvSpPr>
+          <p:cNvPr id="4" name="TextBox 3"/>
+          <p:cNvSpPr txBox="1"/>
+          <p:nvPr/>
+        </p:nvSpPr>
+        <p:spPr>
+          <a:xfrm>
+            <a:off x="822960" y="4160520"/>
+            <a:ext cx="10552176" cy="457200"/>
+          </a:xfrm>
+          <a:prstGeom prst="rect">
+            <a:avLst/>
+          </a:prstGeom>
+          <a:noFill/>
+        </p:spPr>
+        <p:txBody>
+          <a:bodyPr wrap="square" anchor="ctr" lIns="27432" rIns="27432" tIns="9144" bIns="9144">
+            <a:spAutoFit/>
+          </a:bodyPr>
+          <a:lstStyle/>
+          <a:p>
+            <a:pPr algn="ctr">
+              <a:spcBef>
+                <a:spcPts val="0"/>
+              </a:spcBef>
+              <a:spcAft>
+                <a:spcPts val="200"/>
+              </a:spcAft>
+            </a:pPr>
+            <a:r>
+              <a:rPr sz="2200" b="1" i="0">
+                <a:solidFill>
+                  <a:srgbClr val="068734"/>
+                </a:solidFill>
+                <a:latin typeface="Tahoma"/>
+              </a:rPr>
+              <a:t>Before We Build Parts, We Build People</a:t>
+            </a:r>
+          </a:p>
+        </p:txBody>
+      </p:sp>
+      <p:pic>
+        <p:nvPicPr>
+          <p:cNvPr id="5" name="Picture 4" descr="logo_r01.png"/>
+          <p:cNvPicPr>
+            <a:picLocks noChangeAspect="1"/>
+          </p:cNvPicPr>
+          <p:nvPr/>
+        </p:nvPicPr>
+        <p:blipFill>
+          <a:blip r:embed="rId2"/>
+          <a:stretch>
+            <a:fillRect/>
+          </a:stretch>
+        </p:blipFill>
+        <p:spPr>
+          <a:xfrm>
+            <a:off x="249631" y="6448348"/>
+            <a:ext cx="237744" cy="237744"/>
+          </a:xfrm>
+          <a:prstGeom prst="rect">
+            <a:avLst/>
+          </a:prstGeom>
+        </p:spPr>
+      </p:pic>
+      <p:sp>
+        <p:nvSpPr>
+          <p:cNvPr id="6" name="TextBox 5"/>
+          <p:cNvSpPr txBox="1"/>
+          <p:nvPr/>
+        </p:nvSpPr>
+        <p:spPr>
+          <a:xfrm>
+            <a:off x="566928" y="6353251"/>
+            <a:ext cx="3246120" cy="400507"/>
+          </a:xfrm>
+          <a:prstGeom prst="rect">
+            <a:avLst/>
+          </a:prstGeom>
+          <a:noFill/>
+        </p:spPr>
+        <p:txBody>
+          <a:bodyPr wrap="square" anchor="ctr" lIns="27432" rIns="27432" tIns="9144" bIns="9144">
+            <a:spAutoFit/>
+          </a:bodyPr>
+          <a:lstStyle/>
+          <a:p>
+            <a:pPr algn="l">
+              <a:spcBef>
+                <a:spcPts val="0"/>
+              </a:spcBef>
+              <a:spcAft>
+                <a:spcPts val="200"/>
+              </a:spcAft>
+            </a:pPr>
+            <a:r>
+              <a:rPr sz="2000" b="1" i="0">
+                <a:solidFill>
+                  <a:srgbClr val="068734"/>
+                </a:solidFill>
+                <a:latin typeface="Tahoma"/>
+              </a:rPr>
+              <a:t>THAI SUMMIT GROUP</a:t>
+            </a:r>
+          </a:p>
+        </p:txBody>
+      </p:sp>
+      <p:sp>
+        <p:nvSpPr>
+          <p:cNvPr id="7" name="TextBox 6"/>
+          <p:cNvSpPr txBox="1"/>
+          <p:nvPr/>
+        </p:nvSpPr>
+        <p:spPr>
+          <a:xfrm>
+            <a:off x="9400032" y="6510528"/>
+            <a:ext cx="2514600" cy="292608"/>
           </a:xfrm>
           <a:prstGeom prst="rect">
             <a:avLst/>
@@ -15310,7 +15595,7 @@
           </a:bodyPr>
           <a:lstStyle/>
           <a:p>
-            <a:pPr algn="ctr">
+            <a:pPr algn="r">
               <a:spcBef>
                 <a:spcPts val="0"/>
               </a:spcBef>
@@ -15319,97 +15604,13 @@
               </a:spcAft>
             </a:pPr>
             <a:r>
-              <a:rPr sz="3400" b="1" i="0">
-                <a:solidFill>
-                  <a:srgbClr val="FFFFFF"/>
-                </a:solidFill>
-                <a:latin typeface="Tahoma"/>
-              </a:rPr>
-              <a:t>ของทุกชิ้นที่เข้าไลน์ ต้องมีใบในระบบ</a:t>
-            </a:r>
-          </a:p>
-        </p:txBody>
-      </p:sp>
-      <p:sp>
-        <p:nvSpPr>
-          <p:cNvPr id="4" name="TextBox 3"/>
-          <p:cNvSpPr txBox="1"/>
-          <p:nvPr/>
-        </p:nvSpPr>
-        <p:spPr>
-          <a:xfrm>
-            <a:off x="914400" y="3246120"/>
-            <a:ext cx="10332720" cy="548640"/>
-          </a:xfrm>
-          <a:prstGeom prst="rect">
-            <a:avLst/>
-          </a:prstGeom>
-          <a:noFill/>
-        </p:spPr>
-        <p:txBody>
-          <a:bodyPr wrap="square" anchor="t" lIns="27432" rIns="27432" tIns="9144" bIns="9144">
-            <a:spAutoFit/>
-          </a:bodyPr>
-          <a:lstStyle/>
-          <a:p>
-            <a:pPr algn="ctr">
-              <a:spcBef>
-                <a:spcPts val="0"/>
-              </a:spcBef>
-              <a:spcAft>
-                <a:spcPts val="200"/>
-              </a:spcAft>
-            </a:pPr>
-            <a:r>
-              <a:rPr sz="2000" b="1" i="0">
-                <a:solidFill>
-                  <a:srgbClr val="EBD9B0"/>
-                </a:solidFill>
-                <a:latin typeface="Tahoma"/>
-              </a:rPr>
-              <a:t>ไม่มีใบ = วัดไม่ได้ว่าช้าตรงไหน = แก้ไม่ได้</a:t>
-            </a:r>
-          </a:p>
-        </p:txBody>
-      </p:sp>
-      <p:sp>
-        <p:nvSpPr>
-          <p:cNvPr id="5" name="TextBox 4"/>
-          <p:cNvSpPr txBox="1"/>
-          <p:nvPr/>
-        </p:nvSpPr>
-        <p:spPr>
-          <a:xfrm>
-            <a:off x="914400" y="4251960"/>
-            <a:ext cx="10332720" cy="457200"/>
-          </a:xfrm>
-          <a:prstGeom prst="rect">
-            <a:avLst/>
-          </a:prstGeom>
-          <a:noFill/>
-        </p:spPr>
-        <p:txBody>
-          <a:bodyPr wrap="square" anchor="t" lIns="27432" rIns="27432" tIns="9144" bIns="9144">
-            <a:spAutoFit/>
-          </a:bodyPr>
-          <a:lstStyle/>
-          <a:p>
-            <a:pPr algn="ctr">
-              <a:spcBef>
-                <a:spcPts val="0"/>
-              </a:spcBef>
-              <a:spcAft>
-                <a:spcPts val="200"/>
-              </a:spcAft>
-            </a:pPr>
-            <a:r>
-              <a:rPr sz="1600" b="1" i="1">
-                <a:solidFill>
-                  <a:srgbClr val="CFE0C8"/>
-                </a:solidFill>
-                <a:latin typeface="Tahoma"/>
-              </a:rPr>
-              <a:t>Before We Build Parts, We Build People</a:t>
+              <a:rPr sz="1200" b="0" i="0">
+                <a:solidFill>
+                  <a:srgbClr val="068734"/>
+                </a:solidFill>
+                <a:latin typeface="Tahoma"/>
+              </a:rPr>
+              <a:t>6</a:t>
             </a:r>
           </a:p>
         </p:txBody>
